--- a/Week-2/Day-3/GCP_Modules_3_7_Data_Engineering.pptx
+++ b/Week-2/Day-3/GCP_Modules_3_7_Data_Engineering.pptx
@@ -9796,7 +9796,7 @@
           <a:p>
             <a:fld id="{5BCAD085-E8A6-8845-BD4E-CB4CCA059FC4}" type="datetimeFigureOut">
               <a:rPr lang="en-US" smtClean="0"/>
-              <a:t>4/5/2026</a:t>
+              <a:t>4/8/2026</a:t>
             </a:fld>
             <a:endParaRPr lang="en-US"/>
           </a:p>
@@ -10003,7 +10003,7 @@
           <a:p>
             <a:fld id="{5BCAD085-E8A6-8845-BD4E-CB4CCA059FC4}" type="datetimeFigureOut">
               <a:rPr lang="en-US" smtClean="0"/>
-              <a:t>4/5/2026</a:t>
+              <a:t>4/8/2026</a:t>
             </a:fld>
             <a:endParaRPr lang="en-US"/>
           </a:p>
@@ -10183,7 +10183,7 @@
           <a:p>
             <a:fld id="{5BCAD085-E8A6-8845-BD4E-CB4CCA059FC4}" type="datetimeFigureOut">
               <a:rPr lang="en-US" smtClean="0"/>
-              <a:t>4/5/2026</a:t>
+              <a:t>4/8/2026</a:t>
             </a:fld>
             <a:endParaRPr lang="en-US"/>
           </a:p>
@@ -10388,7 +10388,7 @@
           <a:p>
             <a:fld id="{5BCAD085-E8A6-8845-BD4E-CB4CCA059FC4}" type="datetimeFigureOut">
               <a:rPr lang="en-US" smtClean="0"/>
-              <a:t>4/5/2026</a:t>
+              <a:t>4/8/2026</a:t>
             </a:fld>
             <a:endParaRPr lang="en-US"/>
           </a:p>
@@ -17126,7 +17126,7 @@
           <a:p>
             <a:fld id="{5BCAD085-E8A6-8845-BD4E-CB4CCA059FC4}" type="datetimeFigureOut">
               <a:rPr lang="en-US" smtClean="0"/>
-              <a:t>4/5/2026</a:t>
+              <a:t>4/8/2026</a:t>
             </a:fld>
             <a:endParaRPr lang="en-US"/>
           </a:p>
@@ -17400,7 +17400,7 @@
           <a:p>
             <a:fld id="{5BCAD085-E8A6-8845-BD4E-CB4CCA059FC4}" type="datetimeFigureOut">
               <a:rPr lang="en-US" smtClean="0"/>
-              <a:t>4/5/2026</a:t>
+              <a:t>4/8/2026</a:t>
             </a:fld>
             <a:endParaRPr lang="en-US"/>
           </a:p>
@@ -17803,7 +17803,7 @@
           <a:p>
             <a:fld id="{5BCAD085-E8A6-8845-BD4E-CB4CCA059FC4}" type="datetimeFigureOut">
               <a:rPr lang="en-US" smtClean="0"/>
-              <a:t>4/5/2026</a:t>
+              <a:t>4/8/2026</a:t>
             </a:fld>
             <a:endParaRPr lang="en-US"/>
           </a:p>
@@ -17921,7 +17921,7 @@
           <a:p>
             <a:fld id="{5BCAD085-E8A6-8845-BD4E-CB4CCA059FC4}" type="datetimeFigureOut">
               <a:rPr lang="en-US" smtClean="0"/>
-              <a:t>4/5/2026</a:t>
+              <a:t>4/8/2026</a:t>
             </a:fld>
             <a:endParaRPr lang="en-US"/>
           </a:p>
@@ -18016,7 +18016,7 @@
           <a:p>
             <a:fld id="{5BCAD085-E8A6-8845-BD4E-CB4CCA059FC4}" type="datetimeFigureOut">
               <a:rPr lang="en-US" smtClean="0"/>
-              <a:t>4/5/2026</a:t>
+              <a:t>4/8/2026</a:t>
             </a:fld>
             <a:endParaRPr lang="en-US"/>
           </a:p>
@@ -18308,7 +18308,7 @@
           <a:p>
             <a:fld id="{5BCAD085-E8A6-8845-BD4E-CB4CCA059FC4}" type="datetimeFigureOut">
               <a:rPr lang="en-US" smtClean="0"/>
-              <a:t>4/5/2026</a:t>
+              <a:t>4/8/2026</a:t>
             </a:fld>
             <a:endParaRPr lang="en-US"/>
           </a:p>
@@ -18588,7 +18588,7 @@
           <a:p>
             <a:fld id="{5BCAD085-E8A6-8845-BD4E-CB4CCA059FC4}" type="datetimeFigureOut">
               <a:rPr lang="en-US" smtClean="0"/>
-              <a:t>4/5/2026</a:t>
+              <a:t>4/8/2026</a:t>
             </a:fld>
             <a:endParaRPr lang="en-US"/>
           </a:p>
@@ -18838,7 +18838,7 @@
           <a:p>
             <a:fld id="{5BCAD085-E8A6-8845-BD4E-CB4CCA059FC4}" type="datetimeFigureOut">
               <a:rPr lang="en-US" smtClean="0"/>
-              <a:t>4/5/2026</a:t>
+              <a:t>4/8/2026</a:t>
             </a:fld>
             <a:endParaRPr lang="en-US"/>
           </a:p>
@@ -29138,8 +29138,10 @@
           <a:lstStyle/>
           <a:p>
             <a:r>
-              <a:t>Module 5 — BigQuery</a:t>
+              <a:rPr dirty="0" err="1"/>
+              <a:t>BigQuery</a:t>
             </a:r>
+            <a:endParaRPr dirty="0"/>
           </a:p>
         </p:txBody>
       </p:sp>
@@ -29878,7 +29880,8 @@
           <a:lstStyle/>
           <a:p>
             <a:r>
-              <a:t>Module 6 — Orchestration</a:t>
+              <a:rPr dirty="0"/>
+              <a:t>Orchestration</a:t>
             </a:r>
           </a:p>
         </p:txBody>
@@ -30449,7 +30452,11 @@
           <a:lstStyle/>
           <a:p>
             <a:r>
-              <a:t>Module 7 — End-to-End Integration</a:t>
+              <a:t>End-to-End </a:t>
+            </a:r>
+            <a:r>
+              <a:rPr dirty="0"/>
+              <a:t>Integration</a:t>
             </a:r>
           </a:p>
         </p:txBody>
@@ -31184,7 +31191,8 @@
           <a:lstStyle/>
           <a:p>
             <a:r>
-              <a:t>Module 4 — Processing Services</a:t>
+              <a:rPr dirty="0"/>
+              <a:t>Processing Services</a:t>
             </a:r>
           </a:p>
         </p:txBody>
